--- a/tests/fixtures/deck.pptx
+++ b/tests/fixtures/deck.pptx
@@ -9,9 +9,11 @@
     <p:sldId id="257" r:id="rId3"/>
     <p:sldId id="258" r:id="rId4"/>
     <p:sldId id="259" r:id="rId5"/>
+    <p:sldId id="260" r:id="rId6"/>
+    <p:sldId id="261" r:id="rId7"/>
   </p:sldIdLst>
   <p:notesMasterIdLst>
-    <p:notesMasterId r:id="rId6"/>
+    <p:notesMasterId r:id="rId8"/>
   </p:notesMasterIdLst>
   <p:sldSz cx="9144000" cy="5143500"/>
   <p:notesSz cx="5143500" cy="9144000"/>
@@ -811,6 +813,182 @@
 </p:notes>
 </file>
 
+<file path=ppt/notesSlides/notesSlide5.xml><?xml version="1.0" encoding="utf-8"?>
+<p:notes xmlns:a="http://schemas.openxmlformats.org/drawingml/2006/main" xmlns:r="http://schemas.openxmlformats.org/officeDocument/2006/relationships" xmlns:p="http://schemas.openxmlformats.org/presentationml/2006/main">
+  <p:cSld>
+    <p:spTree>
+      <p:nvGrpSpPr>
+        <p:cNvPr id="1" name=""/>
+        <p:cNvGrpSpPr/>
+        <p:nvPr/>
+      </p:nvGrpSpPr>
+      <p:grpSpPr>
+        <a:xfrm>
+          <a:off x="0" y="0"/>
+          <a:ext cx="0" cy="0"/>
+          <a:chOff x="0" y="0"/>
+          <a:chExt cx="0" cy="0"/>
+        </a:xfrm>
+      </p:grpSpPr>
+      <p:sp>
+        <p:nvSpPr>
+          <p:cNvPr id="2" name="Slide Image Placeholder 1"/>
+          <p:cNvSpPr>
+            <a:spLocks noGrp="1" noRot="1" noChangeAspect="1"/>
+          </p:cNvSpPr>
+          <p:nvPr>
+            <p:ph type="sldImg"/>
+          </p:nvPr>
+        </p:nvSpPr>
+        <p:spPr/>
+      </p:sp>
+      <p:sp>
+        <p:nvSpPr>
+          <p:cNvPr id="3" name="Notes Placeholder 2"/>
+          <p:cNvSpPr>
+            <a:spLocks noGrp="1"/>
+          </p:cNvSpPr>
+          <p:nvPr>
+            <p:ph type="body" idx="1"/>
+          </p:nvPr>
+        </p:nvSpPr>
+        <p:spPr/>
+        <p:txBody>
+          <a:bodyPr/>
+          <a:lstStyle/>
+          <a:p>
+            <a:r>
+              <a:rPr lang="en-US" dirty="0"/>
+              <a:t/>
+            </a:r>
+            <a:endParaRPr lang="en-US" dirty="0"/>
+          </a:p>
+        </p:txBody>
+      </p:sp>
+      <p:sp>
+        <p:nvSpPr>
+          <p:cNvPr id="4" name="Slide Number Placeholder 3"/>
+          <p:cNvSpPr>
+            <a:spLocks noGrp="1"/>
+          </p:cNvSpPr>
+          <p:nvPr>
+            <p:ph type="sldNum" sz="quarter" idx="10"/>
+          </p:nvPr>
+        </p:nvSpPr>
+        <p:spPr/>
+        <p:txBody>
+          <a:bodyPr/>
+          <a:lstStyle/>
+          <a:p>
+            <a:fld id="{F7021451-1387-4CA6-816F-3879F97B5CBC}" type="slidenum">
+              <a:rPr lang="en-US"/>
+              <a:t>5</a:t>
+            </a:fld>
+            <a:endParaRPr lang="en-US"/>
+          </a:p>
+        </p:txBody>
+      </p:sp>
+    </p:spTree>
+    <p:extLst>
+      <p:ext uri="{BB962C8B-B14F-4D97-AF65-F5344CB8AC3E}">
+        <p14:creationId xmlns:p14="http://schemas.microsoft.com/office/powerpoint/2010/main" val="1024086991"/>
+      </p:ext>
+    </p:extLst>
+  </p:cSld>
+  <p:clrMapOvr>
+    <a:masterClrMapping/>
+  </p:clrMapOvr>
+</p:notes>
+</file>
+
+<file path=ppt/notesSlides/notesSlide6.xml><?xml version="1.0" encoding="utf-8"?>
+<p:notes xmlns:a="http://schemas.openxmlformats.org/drawingml/2006/main" xmlns:r="http://schemas.openxmlformats.org/officeDocument/2006/relationships" xmlns:p="http://schemas.openxmlformats.org/presentationml/2006/main">
+  <p:cSld>
+    <p:spTree>
+      <p:nvGrpSpPr>
+        <p:cNvPr id="1" name=""/>
+        <p:cNvGrpSpPr/>
+        <p:nvPr/>
+      </p:nvGrpSpPr>
+      <p:grpSpPr>
+        <a:xfrm>
+          <a:off x="0" y="0"/>
+          <a:ext cx="0" cy="0"/>
+          <a:chOff x="0" y="0"/>
+          <a:chExt cx="0" cy="0"/>
+        </a:xfrm>
+      </p:grpSpPr>
+      <p:sp>
+        <p:nvSpPr>
+          <p:cNvPr id="2" name="Slide Image Placeholder 1"/>
+          <p:cNvSpPr>
+            <a:spLocks noGrp="1" noRot="1" noChangeAspect="1"/>
+          </p:cNvSpPr>
+          <p:nvPr>
+            <p:ph type="sldImg"/>
+          </p:nvPr>
+        </p:nvSpPr>
+        <p:spPr/>
+      </p:sp>
+      <p:sp>
+        <p:nvSpPr>
+          <p:cNvPr id="3" name="Notes Placeholder 2"/>
+          <p:cNvSpPr>
+            <a:spLocks noGrp="1"/>
+          </p:cNvSpPr>
+          <p:nvPr>
+            <p:ph type="body" idx="1"/>
+          </p:nvPr>
+        </p:nvSpPr>
+        <p:spPr/>
+        <p:txBody>
+          <a:bodyPr/>
+          <a:lstStyle/>
+          <a:p>
+            <a:r>
+              <a:rPr lang="en-US" dirty="0"/>
+              <a:t/>
+            </a:r>
+            <a:endParaRPr lang="en-US" dirty="0"/>
+          </a:p>
+        </p:txBody>
+      </p:sp>
+      <p:sp>
+        <p:nvSpPr>
+          <p:cNvPr id="4" name="Slide Number Placeholder 3"/>
+          <p:cNvSpPr>
+            <a:spLocks noGrp="1"/>
+          </p:cNvSpPr>
+          <p:nvPr>
+            <p:ph type="sldNum" sz="quarter" idx="10"/>
+          </p:nvPr>
+        </p:nvSpPr>
+        <p:spPr/>
+        <p:txBody>
+          <a:bodyPr/>
+          <a:lstStyle/>
+          <a:p>
+            <a:fld id="{F7021451-1387-4CA6-816F-3879F97B5CBC}" type="slidenum">
+              <a:rPr lang="en-US"/>
+              <a:t>6</a:t>
+            </a:fld>
+            <a:endParaRPr lang="en-US"/>
+          </a:p>
+        </p:txBody>
+      </p:sp>
+    </p:spTree>
+    <p:extLst>
+      <p:ext uri="{BB962C8B-B14F-4D97-AF65-F5344CB8AC3E}">
+        <p14:creationId xmlns:p14="http://schemas.microsoft.com/office/powerpoint/2010/main" val="1024086991"/>
+      </p:ext>
+    </p:extLst>
+  </p:cSld>
+  <p:clrMapOvr>
+    <a:masterClrMapping/>
+  </p:clrMapOvr>
+</p:notes>
+</file>
+
 <file path=ppt/slideLayouts/slideLayout1.xml><?xml version="1.0" encoding="utf-8"?>
 <p:sldLayout xmlns:a="http://schemas.openxmlformats.org/drawingml/2006/main" xmlns:r="http://schemas.openxmlformats.org/officeDocument/2006/relationships" xmlns:p="http://schemas.openxmlformats.org/presentationml/2006/main" preserve="1">
   <p:cSld name="DEFAULT">
@@ -841,6 +1019,101 @@
 </p:sldLayout>
 </file>
 
+<file path=ppt/slideLayouts/slideLayout2.xml><?xml version="1.0" encoding="utf-8"?>
+<p:sldLayout xmlns:a="http://schemas.openxmlformats.org/drawingml/2006/main" xmlns:r="http://schemas.openxmlformats.org/officeDocument/2006/relationships" xmlns:p="http://schemas.openxmlformats.org/presentationml/2006/main" preserve="1">
+  <p:cSld name="PLAIN">
+    <p:spTree>
+      <p:nvGrpSpPr>
+        <p:cNvPr id="1" name=""/>
+        <p:cNvGrpSpPr/>
+        <p:nvPr/>
+      </p:nvGrpSpPr>
+      <p:grpSpPr>
+        <a:xfrm>
+          <a:off x="0" y="0"/>
+          <a:ext cx="0" cy="0"/>
+          <a:chOff x="0" y="0"/>
+          <a:chExt cx="0" cy="0"/>
+        </a:xfrm>
+      </p:grpSpPr>
+      <p:sp>
+        <p:nvSpPr>
+          <p:cNvPr id="2" name="Text 0"/>
+          <p:cNvSpPr/>
+          <p:nvPr>
+            <p:ph idx="100" type="title" hasCustomPrompt="1"/>
+          </p:nvPr>
+        </p:nvSpPr>
+        <p:spPr>
+          <a:xfrm>
+            <a:off x="457200" y="274320"/>
+            <a:ext cx="8229600" cy="731520"/>
+          </a:xfrm>
+          <a:prstGeom prst="rect">
+            <a:avLst/>
+          </a:prstGeom>
+          <a:noFill/>
+          <a:ln/>
+        </p:spPr>
+        <p:txBody>
+          <a:bodyPr wrap="square" rtlCol="0"/>
+          <a:lstStyle>
+            <a:lvl1pPr indent="0" marL="0">
+              <a:buNone/>
+              <a:defRPr lang="en-US" dirty="0"/>
+            </a:lvl1pPr>
+          </a:lstStyle>
+          <a:p>
+            <a:pPr indent="0" marL="0">
+              <a:buNone/>
+            </a:pPr>
+            <a:endParaRPr lang="en-US" dirty="0"/>
+          </a:p>
+        </p:txBody>
+      </p:sp>
+      <p:sp>
+        <p:nvSpPr>
+          <p:cNvPr id="3" name="Text 0"/>
+          <p:cNvSpPr/>
+          <p:nvPr>
+            <p:ph idx="101" type="body" hasCustomPrompt="1"/>
+          </p:nvPr>
+        </p:nvSpPr>
+        <p:spPr>
+          <a:xfrm>
+            <a:off x="457200" y="1188720"/>
+            <a:ext cx="8229600" cy="2743200"/>
+          </a:xfrm>
+          <a:prstGeom prst="rect">
+            <a:avLst/>
+          </a:prstGeom>
+          <a:noFill/>
+          <a:ln/>
+        </p:spPr>
+        <p:txBody>
+          <a:bodyPr wrap="square" rtlCol="0"/>
+          <a:lstStyle>
+            <a:lvl1pPr indent="0" marL="0">
+              <a:buNone/>
+              <a:defRPr lang="en-US" dirty="0"/>
+            </a:lvl1pPr>
+          </a:lstStyle>
+          <a:p>
+            <a:pPr indent="0" marL="0">
+              <a:buNone/>
+            </a:pPr>
+            <a:endParaRPr lang="en-US" dirty="0"/>
+          </a:p>
+        </p:txBody>
+      </p:sp>
+    </p:spTree>
+  </p:cSld>
+  <p:clrMapOvr>
+    <a:masterClrMapping/>
+  </p:clrMapOvr>
+</p:sldLayout>
+</file>
+
 <file path=ppt/slideMasters/slideMaster1.xml><?xml version="1.0" encoding="utf-8"?>
 <p:sldMaster xmlns:a="http://schemas.openxmlformats.org/drawingml/2006/main" xmlns:r="http://schemas.openxmlformats.org/officeDocument/2006/relationships" xmlns:p="http://schemas.openxmlformats.org/presentationml/2006/main">
   <p:cSld>
@@ -863,6 +1136,7 @@
   <p:clrMap bg1="lt1" tx1="dk1" bg2="lt2" tx2="dk2" accent1="accent1" accent2="accent2" accent3="accent3" accent4="accent4" accent5="accent5" accent6="accent6" hlink="hlink" folHlink="folHlink"/>
   <p:sldLayoutIdLst>
     <p:sldLayoutId id="2147483649" r:id="rId1"/>
+    <p:sldLayoutId id="2147483650" r:id="rId2"/>
   </p:sldLayoutIdLst>
   <p:hf sldNum="0" hdr="0" ftr="0" dt="0"/>
   <p:txStyles>
@@ -1551,6 +1825,329 @@
           <a:chExt cx="0" cy="0"/>
         </a:xfrm>
       </p:grpSpPr>
+    </p:spTree>
+  </p:cSld>
+  <p:clrMapOvr>
+    <a:masterClrMapping/>
+  </p:clrMapOvr>
+</p:sld>
+</file>
+
+<file path=ppt/slides/slide5.xml><?xml version="1.0" encoding="utf-8"?>
+<p:sld xmlns:a="http://schemas.openxmlformats.org/drawingml/2006/main" xmlns:r="http://schemas.openxmlformats.org/officeDocument/2006/relationships" xmlns:p="http://schemas.openxmlformats.org/presentationml/2006/main">
+  <p:cSld name="Slide 5">
+    <p:spTree>
+      <p:nvGrpSpPr>
+        <p:cNvPr id="1" name=""/>
+        <p:cNvGrpSpPr/>
+        <p:nvPr/>
+      </p:nvGrpSpPr>
+      <p:grpSpPr>
+        <a:xfrm>
+          <a:off x="0" y="0"/>
+          <a:ext cx="0" cy="0"/>
+          <a:chOff x="0" y="0"/>
+          <a:chExt cx="0" cy="0"/>
+        </a:xfrm>
+      </p:grpSpPr>
+      <p:sp>
+        <p:nvSpPr>
+          <p:cNvPr id="2" name="Text 0"/>
+          <p:cNvSpPr/>
+          <p:nvPr>
+            <p:ph idx="100" type="title" hasCustomPrompt="1"/>
+          </p:nvPr>
+        </p:nvSpPr>
+        <p:spPr>
+          <a:xfrm>
+            <a:off x="457200" y="274320"/>
+            <a:ext cx="8229600" cy="731520"/>
+          </a:xfrm>
+          <a:prstGeom prst="rect">
+            <a:avLst/>
+          </a:prstGeom>
+          <a:noFill/>
+          <a:ln/>
+        </p:spPr>
+        <p:txBody>
+          <a:bodyPr wrap="square" rtlCol="0"/>
+          <a:lstStyle/>
+          <a:p>
+            <a:pPr indent="0" marL="0">
+              <a:buNone/>
+            </a:pPr>
+            <a:r>
+              <a:rPr lang="en-US" dirty="0"/>
+              <a:t>Risks</a:t>
+            </a:r>
+            <a:endParaRPr lang="en-US" dirty="0"/>
+          </a:p>
+        </p:txBody>
+      </p:sp>
+      <p:sp>
+        <p:nvSpPr>
+          <p:cNvPr id="3" name="Text 0"/>
+          <p:cNvSpPr/>
+          <p:nvPr>
+            <p:ph idx="101" type="body" hasCustomPrompt="1"/>
+          </p:nvPr>
+        </p:nvSpPr>
+        <p:spPr>
+          <a:xfrm>
+            <a:off x="457200" y="1188720"/>
+            <a:ext cx="8229600" cy="2743200"/>
+          </a:xfrm>
+          <a:prstGeom prst="rect">
+            <a:avLst/>
+          </a:prstGeom>
+          <a:noFill/>
+          <a:ln/>
+        </p:spPr>
+        <p:txBody>
+          <a:bodyPr wrap="square" rtlCol="0"/>
+          <a:lstStyle/>
+          <a:p>
+            <a:pPr indent="0" marL="0"/>
+            <a:r>
+              <a:rPr lang="en-US" dirty="0">
+                <a:solidFill>
+                  <a:srgbClr val="000000"/>
+                </a:solidFill>
+              </a:rPr>
+              <a:t>Supplier delays</a:t>
+            </a:r>
+            <a:endParaRPr lang="en-US" dirty="0"/>
+          </a:p>
+          <a:p>
+            <a:pPr lvl="1" indent="0" marL="0"/>
+            <a:r>
+              <a:rPr lang="en-US" dirty="0">
+                <a:solidFill>
+                  <a:srgbClr val="000000"/>
+                </a:solidFill>
+              </a:rPr>
+              <a:t>Two plants affected</a:t>
+            </a:r>
+            <a:endParaRPr lang="en-US" dirty="0"/>
+          </a:p>
+          <a:p>
+            <a:pPr indent="0" marL="0">
+              <a:buNone/>
+            </a:pPr>
+            <a:r>
+              <a:rPr lang="en-US" dirty="0">
+                <a:solidFill>
+                  <a:srgbClr val="000000"/>
+                </a:solidFill>
+              </a:rPr>
+              <a:t>Mitigation is in the appendix.</a:t>
+            </a:r>
+            <a:endParaRPr lang="en-US" dirty="0"/>
+          </a:p>
+        </p:txBody>
+      </p:sp>
+    </p:spTree>
+  </p:cSld>
+  <p:clrMapOvr>
+    <a:masterClrMapping/>
+  </p:clrMapOvr>
+</p:sld>
+</file>
+
+<file path=ppt/slides/slide6.xml><?xml version="1.0" encoding="utf-8"?>
+<p:sld xmlns:a="http://schemas.openxmlformats.org/drawingml/2006/main" xmlns:r="http://schemas.openxmlformats.org/officeDocument/2006/relationships" xmlns:p="http://schemas.openxmlformats.org/presentationml/2006/main">
+  <p:cSld name="Slide 6">
+    <p:spTree>
+      <p:nvGrpSpPr>
+        <p:cNvPr id="1" name=""/>
+        <p:cNvGrpSpPr/>
+        <p:nvPr/>
+      </p:nvGrpSpPr>
+      <p:grpSpPr>
+        <a:xfrm>
+          <a:off x="0" y="0"/>
+          <a:ext cx="0" cy="0"/>
+          <a:chOff x="0" y="0"/>
+          <a:chExt cx="0" cy="0"/>
+        </a:xfrm>
+      </p:grpSpPr>
+      <p:sp>
+        <p:nvSpPr>
+          <p:cNvPr id="2" name="Text 0"/>
+          <p:cNvSpPr/>
+          <p:nvPr/>
+        </p:nvSpPr>
+        <p:spPr>
+          <a:xfrm>
+            <a:off x="457200" y="91440"/>
+            <a:ext cx="8229600" cy="274320"/>
+          </a:xfrm>
+          <a:prstGeom prst="rect">
+            <a:avLst/>
+          </a:prstGeom>
+          <a:noFill/>
+          <a:ln/>
+        </p:spPr>
+        <p:txBody>
+          <a:bodyPr wrap="square" rtlCol="0" anchor="ctr"/>
+          <a:lstStyle/>
+          <a:p>
+            <a:pPr indent="0" marL="0">
+              <a:buNone/>
+            </a:pPr>
+            <a:r>
+              <a:rPr lang="en-US" sz="1000" dirty="0">
+                <a:solidFill>
+                  <a:srgbClr val="000000"/>
+                </a:solidFill>
+              </a:rPr>
+              <a:t>Small print at the top</a:t>
+            </a:r>
+            <a:endParaRPr lang="en-US" sz="1000" dirty="0"/>
+          </a:p>
+        </p:txBody>
+      </p:sp>
+      <p:sp>
+        <p:nvSpPr>
+          <p:cNvPr id="3" name="Text 1"/>
+          <p:cNvSpPr/>
+          <p:nvPr/>
+        </p:nvSpPr>
+        <p:spPr>
+          <a:xfrm>
+            <a:off x="457200" y="457200"/>
+            <a:ext cx="8229600" cy="731520"/>
+          </a:xfrm>
+          <a:prstGeom prst="rect">
+            <a:avLst/>
+          </a:prstGeom>
+          <a:noFill/>
+          <a:ln/>
+        </p:spPr>
+        <p:txBody>
+          <a:bodyPr wrap="square" rtlCol="0" anchor="ctr"/>
+          <a:lstStyle/>
+          <a:p>
+            <a:pPr indent="0" marL="0">
+              <a:buNone/>
+            </a:pPr>
+            <a:r>
+              <a:rPr lang="en-US" sz="2800" dirty="0">
+                <a:solidFill>
+                  <a:srgbClr val="000000"/>
+                </a:solidFill>
+              </a:rPr>
+              <a:t>Plan for Q4</a:t>
+            </a:r>
+            <a:endParaRPr lang="en-US" sz="2800" dirty="0"/>
+          </a:p>
+        </p:txBody>
+      </p:sp>
+      <p:sp>
+        <p:nvSpPr>
+          <p:cNvPr id="4" name="Text 2"/>
+          <p:cNvSpPr/>
+          <p:nvPr/>
+        </p:nvSpPr>
+        <p:spPr>
+          <a:xfrm>
+            <a:off x="457200" y="1371600"/>
+            <a:ext cx="8229600" cy="1828800"/>
+          </a:xfrm>
+          <a:prstGeom prst="rect">
+            <a:avLst/>
+          </a:prstGeom>
+          <a:noFill/>
+          <a:ln/>
+        </p:spPr>
+        <p:txBody>
+          <a:bodyPr wrap="square" rtlCol="0" anchor="ctr"/>
+          <a:lstStyle/>
+          <a:p>
+            <a:pPr marL="342900" indent="-342900">
+              <a:buSzPct val="100000"/>
+              <a:buFont typeface="+mj-lt"/>
+              <a:buAutoNum type="arabicPeriod" startAt="1"/>
+            </a:pPr>
+            <a:r>
+              <a:rPr lang="en-US" dirty="0">
+                <a:solidFill>
+                  <a:srgbClr val="000000"/>
+                </a:solidFill>
+              </a:rPr>
+              <a:t>Close the lease</a:t>
+            </a:r>
+            <a:endParaRPr lang="en-US" dirty="0"/>
+          </a:p>
+          <a:p>
+            <a:pPr lvl="1" marL="685800" indent="-342900">
+              <a:buSzPct val="100000"/>
+              <a:buChar char="•"/>
+            </a:pPr>
+            <a:r>
+              <a:rPr lang="en-US" dirty="0">
+                <a:solidFill>
+                  <a:srgbClr val="000000"/>
+                </a:solidFill>
+              </a:rPr>
+              <a:t>Notice by October</a:t>
+            </a:r>
+            <a:endParaRPr lang="en-US" dirty="0"/>
+          </a:p>
+          <a:p>
+            <a:pPr marL="342900" indent="-342900">
+              <a:buSzPct val="100000"/>
+              <a:buFont typeface="+mj-lt"/>
+              <a:buAutoNum type="arabicPeriod" startAt="1"/>
+            </a:pPr>
+            <a:r>
+              <a:rPr lang="en-US" dirty="0">
+                <a:solidFill>
+                  <a:srgbClr val="000000"/>
+                </a:solidFill>
+              </a:rPr>
+              <a:t>Hire support</a:t>
+            </a:r>
+            <a:endParaRPr lang="en-US" dirty="0"/>
+          </a:p>
+        </p:txBody>
+      </p:sp>
+      <p:sp>
+        <p:nvSpPr>
+          <p:cNvPr id="5" name="Text 3"/>
+          <p:cNvSpPr/>
+          <p:nvPr/>
+        </p:nvSpPr>
+        <p:spPr>
+          <a:xfrm>
+            <a:off x="457200" y="3657600"/>
+            <a:ext cx="8229600" cy="457200"/>
+          </a:xfrm>
+          <a:prstGeom prst="rect">
+            <a:avLst/>
+          </a:prstGeom>
+          <a:noFill/>
+          <a:ln/>
+        </p:spPr>
+        <p:txBody>
+          <a:bodyPr wrap="square" rtlCol="0" anchor="ctr"/>
+          <a:lstStyle/>
+          <a:p>
+            <a:pPr indent="0" marL="0">
+              <a:buNone/>
+            </a:pPr>
+            <a:r>
+              <a:rPr lang="en-US" sz="1200" dirty="0">
+                <a:solidFill>
+                  <a:srgbClr val="000000"/>
+                </a:solidFill>
+              </a:rPr>
+              <a:t>Figures are estimates.</a:t>
+            </a:r>
+            <a:endParaRPr lang="en-US" sz="1200" dirty="0"/>
+          </a:p>
+        </p:txBody>
+      </p:sp>
     </p:spTree>
   </p:cSld>
   <p:clrMapOvr>
